--- a/How Great is Our God-CH.pptx
+++ b/How Great is Our God-CH.pptx
@@ -9,7 +9,9 @@
     <p:sldId id="284" r:id="rId3"/>
     <p:sldId id="276" r:id="rId4"/>
     <p:sldId id="285" r:id="rId5"/>
-    <p:sldId id="286" r:id="rId6"/>
+    <p:sldId id="287" r:id="rId6"/>
+    <p:sldId id="286" r:id="rId7"/>
+    <p:sldId id="288" r:id="rId8"/>
   </p:sldIdLst>
   <p:sldSz cx="12192000" cy="6858000"/>
   <p:notesSz cx="6858000" cy="9144000"/>
@@ -263,7 +265,7 @@
           <a:p>
             <a:fld id="{E759A0DE-F190-5444-87AC-4719D5F20D15}" type="datetimeFigureOut">
               <a:rPr lang="en-US" smtClean="0"/>
-              <a:t>8/3/26</a:t>
+              <a:t>9/26/26</a:t>
             </a:fld>
             <a:endParaRPr lang="en-US"/>
           </a:p>
@@ -461,7 +463,7 @@
           <a:p>
             <a:fld id="{E759A0DE-F190-5444-87AC-4719D5F20D15}" type="datetimeFigureOut">
               <a:rPr lang="en-US" smtClean="0"/>
-              <a:t>8/3/26</a:t>
+              <a:t>9/26/26</a:t>
             </a:fld>
             <a:endParaRPr lang="en-US"/>
           </a:p>
@@ -669,7 +671,7 @@
           <a:p>
             <a:fld id="{E759A0DE-F190-5444-87AC-4719D5F20D15}" type="datetimeFigureOut">
               <a:rPr lang="en-US" smtClean="0"/>
-              <a:t>8/3/26</a:t>
+              <a:t>9/26/26</a:t>
             </a:fld>
             <a:endParaRPr lang="en-US"/>
           </a:p>
@@ -867,7 +869,7 @@
           <a:p>
             <a:fld id="{E759A0DE-F190-5444-87AC-4719D5F20D15}" type="datetimeFigureOut">
               <a:rPr lang="en-US" smtClean="0"/>
-              <a:t>8/3/26</a:t>
+              <a:t>9/26/26</a:t>
             </a:fld>
             <a:endParaRPr lang="en-US"/>
           </a:p>
@@ -1142,7 +1144,7 @@
           <a:p>
             <a:fld id="{E759A0DE-F190-5444-87AC-4719D5F20D15}" type="datetimeFigureOut">
               <a:rPr lang="en-US" smtClean="0"/>
-              <a:t>8/3/26</a:t>
+              <a:t>9/26/26</a:t>
             </a:fld>
             <a:endParaRPr lang="en-US"/>
           </a:p>
@@ -1407,7 +1409,7 @@
           <a:p>
             <a:fld id="{E759A0DE-F190-5444-87AC-4719D5F20D15}" type="datetimeFigureOut">
               <a:rPr lang="en-US" smtClean="0"/>
-              <a:t>8/3/26</a:t>
+              <a:t>9/26/26</a:t>
             </a:fld>
             <a:endParaRPr lang="en-US"/>
           </a:p>
@@ -1819,7 +1821,7 @@
           <a:p>
             <a:fld id="{E759A0DE-F190-5444-87AC-4719D5F20D15}" type="datetimeFigureOut">
               <a:rPr lang="en-US" smtClean="0"/>
-              <a:t>8/3/26</a:t>
+              <a:t>9/26/26</a:t>
             </a:fld>
             <a:endParaRPr lang="en-US"/>
           </a:p>
@@ -1960,7 +1962,7 @@
           <a:p>
             <a:fld id="{E759A0DE-F190-5444-87AC-4719D5F20D15}" type="datetimeFigureOut">
               <a:rPr lang="en-US" smtClean="0"/>
-              <a:t>8/3/26</a:t>
+              <a:t>9/26/26</a:t>
             </a:fld>
             <a:endParaRPr lang="en-US"/>
           </a:p>
@@ -2073,7 +2075,7 @@
           <a:p>
             <a:fld id="{E759A0DE-F190-5444-87AC-4719D5F20D15}" type="datetimeFigureOut">
               <a:rPr lang="en-US" smtClean="0"/>
-              <a:t>8/3/26</a:t>
+              <a:t>9/26/26</a:t>
             </a:fld>
             <a:endParaRPr lang="en-US"/>
           </a:p>
@@ -2384,7 +2386,7 @@
           <a:p>
             <a:fld id="{E759A0DE-F190-5444-87AC-4719D5F20D15}" type="datetimeFigureOut">
               <a:rPr lang="en-US" smtClean="0"/>
-              <a:t>8/3/26</a:t>
+              <a:t>9/26/26</a:t>
             </a:fld>
             <a:endParaRPr lang="en-US"/>
           </a:p>
@@ -2672,7 +2674,7 @@
           <a:p>
             <a:fld id="{E759A0DE-F190-5444-87AC-4719D5F20D15}" type="datetimeFigureOut">
               <a:rPr lang="en-US" smtClean="0"/>
-              <a:t>8/3/26</a:t>
+              <a:t>9/26/26</a:t>
             </a:fld>
             <a:endParaRPr lang="en-US"/>
           </a:p>
@@ -2913,7 +2915,7 @@
           <a:p>
             <a:fld id="{E759A0DE-F190-5444-87AC-4719D5F20D15}" type="datetimeFigureOut">
               <a:rPr lang="en-US" smtClean="0"/>
-              <a:t>8/3/26</a:t>
+              <a:t>9/26/26</a:t>
             </a:fld>
             <a:endParaRPr lang="en-US"/>
           </a:p>
@@ -4381,6 +4383,172 @@
     <p:bg>
       <p:bgPr>
         <a:solidFill>
+          <a:schemeClr val="accent5">
+            <a:lumMod val="50000"/>
+          </a:schemeClr>
+        </a:solidFill>
+        <a:effectLst/>
+      </p:bgPr>
+    </p:bg>
+    <p:spTree>
+      <p:nvGrpSpPr>
+        <p:cNvPr id="1" name="">
+          <a:extLst>
+            <a:ext uri="{FF2B5EF4-FFF2-40B4-BE49-F238E27FC236}">
+              <a16:creationId xmlns:a16="http://schemas.microsoft.com/office/drawing/2014/main" id="{F288A639-7A11-B227-1875-62D547B98451}"/>
+            </a:ext>
+          </a:extLst>
+        </p:cNvPr>
+        <p:cNvGrpSpPr/>
+        <p:nvPr/>
+      </p:nvGrpSpPr>
+      <p:grpSpPr>
+        <a:xfrm>
+          <a:off x="0" y="0"/>
+          <a:ext cx="0" cy="0"/>
+          <a:chOff x="0" y="0"/>
+          <a:chExt cx="0" cy="0"/>
+        </a:xfrm>
+      </p:grpSpPr>
+      <p:sp>
+        <p:nvSpPr>
+          <p:cNvPr id="3" name="Subtitle 2">
+            <a:extLst>
+              <a:ext uri="{FF2B5EF4-FFF2-40B4-BE49-F238E27FC236}">
+                <a16:creationId xmlns:a16="http://schemas.microsoft.com/office/drawing/2014/main" id="{7440EED3-798B-3BAA-1960-5A4D40EBF88D}"/>
+              </a:ext>
+            </a:extLst>
+          </p:cNvPr>
+          <p:cNvSpPr>
+            <a:spLocks noGrp="1"/>
+          </p:cNvSpPr>
+          <p:nvPr>
+            <p:ph type="subTitle" idx="1"/>
+          </p:nvPr>
+        </p:nvSpPr>
+        <p:spPr>
+          <a:xfrm>
+            <a:off x="222738" y="211015"/>
+            <a:ext cx="11699631" cy="6482862"/>
+          </a:xfrm>
+        </p:spPr>
+        <p:txBody>
+          <a:bodyPr>
+            <a:noAutofit/>
+          </a:bodyPr>
+          <a:lstStyle/>
+          <a:p>
+            <a:pPr algn="l"/>
+            <a:r>
+              <a:rPr lang="en-US" sz="3600" dirty="0">
+                <a:solidFill>
+                  <a:schemeClr val="bg1"/>
+                </a:solidFill>
+                <a:latin typeface="Avenir Medium" panose="02000503020000020003" pitchFamily="2" charset="0"/>
+                <a:ea typeface="Bodoni Ornaments" pitchFamily="2" charset="0"/>
+              </a:rPr>
+              <a:t> </a:t>
+            </a:r>
+          </a:p>
+          <a:p>
+            <a:pPr algn="l"/>
+            <a:r>
+              <a:rPr lang="en-US" sz="3600" dirty="0">
+                <a:solidFill>
+                  <a:srgbClr val="FFFF00"/>
+                </a:solidFill>
+                <a:latin typeface="Avenir Medium" panose="02000503020000020003" pitchFamily="2" charset="0"/>
+                <a:ea typeface="Bodoni Ornaments" pitchFamily="2" charset="0"/>
+              </a:rPr>
+              <a:t>G</a:t>
+            </a:r>
+          </a:p>
+          <a:p>
+            <a:pPr algn="l"/>
+            <a:r>
+              <a:rPr lang="en-US" sz="3600" dirty="0">
+                <a:solidFill>
+                  <a:schemeClr val="bg1"/>
+                </a:solidFill>
+                <a:latin typeface="Avenir Medium" panose="02000503020000020003" pitchFamily="2" charset="0"/>
+                <a:ea typeface="Bodoni Ornaments" pitchFamily="2" charset="0"/>
+              </a:rPr>
+              <a:t>How great is our God, sing with me</a:t>
+            </a:r>
+          </a:p>
+          <a:p>
+            <a:pPr algn="l"/>
+            <a:r>
+              <a:rPr lang="en-US" sz="3600" dirty="0">
+                <a:solidFill>
+                  <a:srgbClr val="FFFF00"/>
+                </a:solidFill>
+                <a:latin typeface="Avenir Medium" panose="02000503020000020003" pitchFamily="2" charset="0"/>
+                <a:ea typeface="Bodoni Ornaments" pitchFamily="2" charset="0"/>
+              </a:rPr>
+              <a:t>    Em</a:t>
+            </a:r>
+          </a:p>
+          <a:p>
+            <a:pPr algn="l"/>
+            <a:r>
+              <a:rPr lang="en-US" sz="3600" dirty="0">
+                <a:solidFill>
+                  <a:schemeClr val="bg1"/>
+                </a:solidFill>
+                <a:latin typeface="Avenir Medium" panose="02000503020000020003" pitchFamily="2" charset="0"/>
+                <a:ea typeface="Bodoni Ornaments" pitchFamily="2" charset="0"/>
+              </a:rPr>
+              <a:t>How great is our God, all will see</a:t>
+            </a:r>
+          </a:p>
+          <a:p>
+            <a:pPr algn="l"/>
+            <a:r>
+              <a:rPr lang="en-US" sz="3600" dirty="0">
+                <a:solidFill>
+                  <a:srgbClr val="FFFF00"/>
+                </a:solidFill>
+                <a:latin typeface="Avenir Medium" panose="02000503020000020003" pitchFamily="2" charset="0"/>
+                <a:ea typeface="Bodoni Ornaments" pitchFamily="2" charset="0"/>
+              </a:rPr>
+              <a:t>        C                 D                G                      </a:t>
+            </a:r>
+          </a:p>
+          <a:p>
+            <a:pPr algn="l"/>
+            <a:r>
+              <a:rPr lang="en-US" sz="3600" dirty="0">
+                <a:solidFill>
+                  <a:schemeClr val="bg1"/>
+                </a:solidFill>
+                <a:latin typeface="Avenir Medium" panose="02000503020000020003" pitchFamily="2" charset="0"/>
+                <a:ea typeface="Bodoni Ornaments" pitchFamily="2" charset="0"/>
+              </a:rPr>
+              <a:t>How great, how great is our God</a:t>
+            </a:r>
+          </a:p>
+        </p:txBody>
+      </p:sp>
+    </p:spTree>
+    <p:extLst>
+      <p:ext uri="{BB962C8B-B14F-4D97-AF65-F5344CB8AC3E}">
+        <p14:creationId xmlns:p14="http://schemas.microsoft.com/office/powerpoint/2010/main" val="842083277"/>
+      </p:ext>
+    </p:extLst>
+  </p:cSld>
+  <p:clrMapOvr>
+    <a:masterClrMapping/>
+  </p:clrMapOvr>
+</p:sld>
+</file>
+
+<file path=ppt/slides/slide6.xml><?xml version="1.0" encoding="utf-8"?>
+<p:sld xmlns:a="http://schemas.openxmlformats.org/drawingml/2006/main" xmlns:r="http://schemas.openxmlformats.org/officeDocument/2006/relationships" xmlns:p="http://schemas.openxmlformats.org/presentationml/2006/main">
+  <p:cSld>
+    <p:bg>
+      <p:bgPr>
+        <a:solidFill>
           <a:schemeClr val="tx1"/>
         </a:solidFill>
         <a:effectLst/>
@@ -4425,7 +4593,7 @@
         <p:spPr>
           <a:xfrm>
             <a:off x="222738" y="211015"/>
-            <a:ext cx="11207262" cy="6482862"/>
+            <a:ext cx="8967757" cy="6482862"/>
           </a:xfrm>
         </p:spPr>
         <p:txBody>
@@ -4559,10 +4727,254 @@
           </a:p>
         </p:txBody>
       </p:sp>
+      <p:sp>
+        <p:nvSpPr>
+          <p:cNvPr id="2" name="TextBox 1">
+            <a:extLst>
+              <a:ext uri="{FF2B5EF4-FFF2-40B4-BE49-F238E27FC236}">
+                <a16:creationId xmlns:a16="http://schemas.microsoft.com/office/drawing/2014/main" id="{14790640-F820-2921-8C3F-0FBB8007D039}"/>
+              </a:ext>
+            </a:extLst>
+          </p:cNvPr>
+          <p:cNvSpPr txBox="1"/>
+          <p:nvPr/>
+        </p:nvSpPr>
+        <p:spPr>
+          <a:xfrm>
+            <a:off x="8309847" y="6047546"/>
+            <a:ext cx="2624436" cy="646331"/>
+          </a:xfrm>
+          <a:prstGeom prst="rect">
+            <a:avLst/>
+          </a:prstGeom>
+          <a:noFill/>
+        </p:spPr>
+        <p:txBody>
+          <a:bodyPr wrap="none" rtlCol="0">
+            <a:spAutoFit/>
+          </a:bodyPr>
+          <a:lstStyle/>
+          <a:p>
+            <a:r>
+              <a:rPr lang="en-US" sz="3600" b="1" dirty="0">
+                <a:solidFill>
+                  <a:schemeClr val="bg1"/>
+                </a:solidFill>
+              </a:rPr>
+              <a:t>x2 &amp; chorus</a:t>
+            </a:r>
+          </a:p>
+        </p:txBody>
+      </p:sp>
     </p:spTree>
     <p:extLst>
       <p:ext uri="{BB962C8B-B14F-4D97-AF65-F5344CB8AC3E}">
         <p14:creationId xmlns:p14="http://schemas.microsoft.com/office/powerpoint/2010/main" val="598285362"/>
+      </p:ext>
+    </p:extLst>
+  </p:cSld>
+  <p:clrMapOvr>
+    <a:masterClrMapping/>
+  </p:clrMapOvr>
+</p:sld>
+</file>
+
+<file path=ppt/slides/slide7.xml><?xml version="1.0" encoding="utf-8"?>
+<p:sld xmlns:a="http://schemas.openxmlformats.org/drawingml/2006/main" xmlns:r="http://schemas.openxmlformats.org/officeDocument/2006/relationships" xmlns:p="http://schemas.openxmlformats.org/presentationml/2006/main">
+  <p:cSld>
+    <p:bg>
+      <p:bgPr>
+        <a:solidFill>
+          <a:schemeClr val="accent5">
+            <a:lumMod val="50000"/>
+          </a:schemeClr>
+        </a:solidFill>
+        <a:effectLst/>
+      </p:bgPr>
+    </p:bg>
+    <p:spTree>
+      <p:nvGrpSpPr>
+        <p:cNvPr id="1" name="">
+          <a:extLst>
+            <a:ext uri="{FF2B5EF4-FFF2-40B4-BE49-F238E27FC236}">
+              <a16:creationId xmlns:a16="http://schemas.microsoft.com/office/drawing/2014/main" id="{013EFA22-040C-B78C-2320-8FB1074E56FF}"/>
+            </a:ext>
+          </a:extLst>
+        </p:cNvPr>
+        <p:cNvGrpSpPr/>
+        <p:nvPr/>
+      </p:nvGrpSpPr>
+      <p:grpSpPr>
+        <a:xfrm>
+          <a:off x="0" y="0"/>
+          <a:ext cx="0" cy="0"/>
+          <a:chOff x="0" y="0"/>
+          <a:chExt cx="0" cy="0"/>
+        </a:xfrm>
+      </p:grpSpPr>
+      <p:sp>
+        <p:nvSpPr>
+          <p:cNvPr id="3" name="Subtitle 2">
+            <a:extLst>
+              <a:ext uri="{FF2B5EF4-FFF2-40B4-BE49-F238E27FC236}">
+                <a16:creationId xmlns:a16="http://schemas.microsoft.com/office/drawing/2014/main" id="{BBC829E1-1D87-6F2E-433C-29745FAD8A2A}"/>
+              </a:ext>
+            </a:extLst>
+          </p:cNvPr>
+          <p:cNvSpPr>
+            <a:spLocks noGrp="1"/>
+          </p:cNvSpPr>
+          <p:nvPr>
+            <p:ph type="subTitle" idx="1"/>
+          </p:nvPr>
+        </p:nvSpPr>
+        <p:spPr>
+          <a:xfrm>
+            <a:off x="222738" y="211015"/>
+            <a:ext cx="11699631" cy="6482862"/>
+          </a:xfrm>
+        </p:spPr>
+        <p:txBody>
+          <a:bodyPr>
+            <a:noAutofit/>
+          </a:bodyPr>
+          <a:lstStyle/>
+          <a:p>
+            <a:pPr algn="l"/>
+            <a:r>
+              <a:rPr lang="en-US" sz="3600" dirty="0">
+                <a:solidFill>
+                  <a:schemeClr val="bg1"/>
+                </a:solidFill>
+                <a:latin typeface="Avenir Medium" panose="02000503020000020003" pitchFamily="2" charset="0"/>
+                <a:ea typeface="Bodoni Ornaments" pitchFamily="2" charset="0"/>
+              </a:rPr>
+              <a:t> </a:t>
+            </a:r>
+          </a:p>
+          <a:p>
+            <a:pPr algn="l"/>
+            <a:r>
+              <a:rPr lang="en-US" sz="3600" dirty="0">
+                <a:solidFill>
+                  <a:srgbClr val="FFFF00"/>
+                </a:solidFill>
+                <a:latin typeface="Avenir Medium" panose="02000503020000020003" pitchFamily="2" charset="0"/>
+                <a:ea typeface="Bodoni Ornaments" pitchFamily="2" charset="0"/>
+              </a:rPr>
+              <a:t>G</a:t>
+            </a:r>
+          </a:p>
+          <a:p>
+            <a:pPr algn="l"/>
+            <a:r>
+              <a:rPr lang="en-US" sz="3600" dirty="0">
+                <a:solidFill>
+                  <a:schemeClr val="bg1"/>
+                </a:solidFill>
+                <a:latin typeface="Avenir Medium" panose="02000503020000020003" pitchFamily="2" charset="0"/>
+                <a:ea typeface="Bodoni Ornaments" pitchFamily="2" charset="0"/>
+              </a:rPr>
+              <a:t>How great is our God, sing with me</a:t>
+            </a:r>
+          </a:p>
+          <a:p>
+            <a:pPr algn="l"/>
+            <a:r>
+              <a:rPr lang="en-US" sz="3600" dirty="0">
+                <a:solidFill>
+                  <a:srgbClr val="FFFF00"/>
+                </a:solidFill>
+                <a:latin typeface="Avenir Medium" panose="02000503020000020003" pitchFamily="2" charset="0"/>
+                <a:ea typeface="Bodoni Ornaments" pitchFamily="2" charset="0"/>
+              </a:rPr>
+              <a:t>    Em</a:t>
+            </a:r>
+          </a:p>
+          <a:p>
+            <a:pPr algn="l"/>
+            <a:r>
+              <a:rPr lang="en-US" sz="3600" dirty="0">
+                <a:solidFill>
+                  <a:schemeClr val="bg1"/>
+                </a:solidFill>
+                <a:latin typeface="Avenir Medium" panose="02000503020000020003" pitchFamily="2" charset="0"/>
+                <a:ea typeface="Bodoni Ornaments" pitchFamily="2" charset="0"/>
+              </a:rPr>
+              <a:t>How great is our God, all will see</a:t>
+            </a:r>
+          </a:p>
+          <a:p>
+            <a:pPr algn="l"/>
+            <a:r>
+              <a:rPr lang="en-US" sz="3600" dirty="0">
+                <a:solidFill>
+                  <a:srgbClr val="FFFF00"/>
+                </a:solidFill>
+                <a:latin typeface="Avenir Medium" panose="02000503020000020003" pitchFamily="2" charset="0"/>
+                <a:ea typeface="Bodoni Ornaments" pitchFamily="2" charset="0"/>
+              </a:rPr>
+              <a:t>        C                 D                G                      </a:t>
+            </a:r>
+          </a:p>
+          <a:p>
+            <a:pPr algn="l"/>
+            <a:r>
+              <a:rPr lang="en-US" sz="3600" dirty="0">
+                <a:solidFill>
+                  <a:schemeClr val="bg1"/>
+                </a:solidFill>
+                <a:latin typeface="Avenir Medium" panose="02000503020000020003" pitchFamily="2" charset="0"/>
+                <a:ea typeface="Bodoni Ornaments" pitchFamily="2" charset="0"/>
+              </a:rPr>
+              <a:t>How great, how great is our God</a:t>
+            </a:r>
+          </a:p>
+        </p:txBody>
+      </p:sp>
+      <p:sp>
+        <p:nvSpPr>
+          <p:cNvPr id="2" name="TextBox 1">
+            <a:extLst>
+              <a:ext uri="{FF2B5EF4-FFF2-40B4-BE49-F238E27FC236}">
+                <a16:creationId xmlns:a16="http://schemas.microsoft.com/office/drawing/2014/main" id="{D9DE8D71-89C6-7786-DC64-EB2548A77339}"/>
+              </a:ext>
+            </a:extLst>
+          </p:cNvPr>
+          <p:cNvSpPr txBox="1"/>
+          <p:nvPr/>
+        </p:nvSpPr>
+        <p:spPr>
+          <a:xfrm>
+            <a:off x="8622127" y="6047546"/>
+            <a:ext cx="1558440" cy="646331"/>
+          </a:xfrm>
+          <a:prstGeom prst="rect">
+            <a:avLst/>
+          </a:prstGeom>
+          <a:noFill/>
+        </p:spPr>
+        <p:txBody>
+          <a:bodyPr wrap="none" rtlCol="0">
+            <a:spAutoFit/>
+          </a:bodyPr>
+          <a:lstStyle/>
+          <a:p>
+            <a:r>
+              <a:rPr lang="en-US" sz="3600" b="1" dirty="0">
+                <a:solidFill>
+                  <a:schemeClr val="bg1"/>
+                </a:solidFill>
+              </a:rPr>
+              <a:t>x2 End</a:t>
+            </a:r>
+          </a:p>
+        </p:txBody>
+      </p:sp>
+    </p:spTree>
+    <p:extLst>
+      <p:ext uri="{BB962C8B-B14F-4D97-AF65-F5344CB8AC3E}">
+        <p14:creationId xmlns:p14="http://schemas.microsoft.com/office/powerpoint/2010/main" val="2599999549"/>
       </p:ext>
     </p:extLst>
   </p:cSld>

--- a/How Great is Our God-CH.pptx
+++ b/How Great is Our God-CH.pptx
@@ -265,7 +265,7 @@
           <a:p>
             <a:fld id="{E759A0DE-F190-5444-87AC-4719D5F20D15}" type="datetimeFigureOut">
               <a:rPr lang="en-US" smtClean="0"/>
-              <a:t>9/26/26</a:t>
+              <a:t>10/8/26</a:t>
             </a:fld>
             <a:endParaRPr lang="en-US"/>
           </a:p>
@@ -463,7 +463,7 @@
           <a:p>
             <a:fld id="{E759A0DE-F190-5444-87AC-4719D5F20D15}" type="datetimeFigureOut">
               <a:rPr lang="en-US" smtClean="0"/>
-              <a:t>9/26/26</a:t>
+              <a:t>10/8/26</a:t>
             </a:fld>
             <a:endParaRPr lang="en-US"/>
           </a:p>
@@ -671,7 +671,7 @@
           <a:p>
             <a:fld id="{E759A0DE-F190-5444-87AC-4719D5F20D15}" type="datetimeFigureOut">
               <a:rPr lang="en-US" smtClean="0"/>
-              <a:t>9/26/26</a:t>
+              <a:t>10/8/26</a:t>
             </a:fld>
             <a:endParaRPr lang="en-US"/>
           </a:p>
@@ -869,7 +869,7 @@
           <a:p>
             <a:fld id="{E759A0DE-F190-5444-87AC-4719D5F20D15}" type="datetimeFigureOut">
               <a:rPr lang="en-US" smtClean="0"/>
-              <a:t>9/26/26</a:t>
+              <a:t>10/8/26</a:t>
             </a:fld>
             <a:endParaRPr lang="en-US"/>
           </a:p>
@@ -1144,7 +1144,7 @@
           <a:p>
             <a:fld id="{E759A0DE-F190-5444-87AC-4719D5F20D15}" type="datetimeFigureOut">
               <a:rPr lang="en-US" smtClean="0"/>
-              <a:t>9/26/26</a:t>
+              <a:t>10/8/26</a:t>
             </a:fld>
             <a:endParaRPr lang="en-US"/>
           </a:p>
@@ -1409,7 +1409,7 @@
           <a:p>
             <a:fld id="{E759A0DE-F190-5444-87AC-4719D5F20D15}" type="datetimeFigureOut">
               <a:rPr lang="en-US" smtClean="0"/>
-              <a:t>9/26/26</a:t>
+              <a:t>10/8/26</a:t>
             </a:fld>
             <a:endParaRPr lang="en-US"/>
           </a:p>
@@ -1821,7 +1821,7 @@
           <a:p>
             <a:fld id="{E759A0DE-F190-5444-87AC-4719D5F20D15}" type="datetimeFigureOut">
               <a:rPr lang="en-US" smtClean="0"/>
-              <a:t>9/26/26</a:t>
+              <a:t>10/8/26</a:t>
             </a:fld>
             <a:endParaRPr lang="en-US"/>
           </a:p>
@@ -1962,7 +1962,7 @@
           <a:p>
             <a:fld id="{E759A0DE-F190-5444-87AC-4719D5F20D15}" type="datetimeFigureOut">
               <a:rPr lang="en-US" smtClean="0"/>
-              <a:t>9/26/26</a:t>
+              <a:t>10/8/26</a:t>
             </a:fld>
             <a:endParaRPr lang="en-US"/>
           </a:p>
@@ -2075,7 +2075,7 @@
           <a:p>
             <a:fld id="{E759A0DE-F190-5444-87AC-4719D5F20D15}" type="datetimeFigureOut">
               <a:rPr lang="en-US" smtClean="0"/>
-              <a:t>9/26/26</a:t>
+              <a:t>10/8/26</a:t>
             </a:fld>
             <a:endParaRPr lang="en-US"/>
           </a:p>
@@ -2386,7 +2386,7 @@
           <a:p>
             <a:fld id="{E759A0DE-F190-5444-87AC-4719D5F20D15}" type="datetimeFigureOut">
               <a:rPr lang="en-US" smtClean="0"/>
-              <a:t>9/26/26</a:t>
+              <a:t>10/8/26</a:t>
             </a:fld>
             <a:endParaRPr lang="en-US"/>
           </a:p>
@@ -2674,7 +2674,7 @@
           <a:p>
             <a:fld id="{E759A0DE-F190-5444-87AC-4719D5F20D15}" type="datetimeFigureOut">
               <a:rPr lang="en-US" smtClean="0"/>
-              <a:t>9/26/26</a:t>
+              <a:t>10/8/26</a:t>
             </a:fld>
             <a:endParaRPr lang="en-US"/>
           </a:p>
@@ -2915,7 +2915,7 @@
           <a:p>
             <a:fld id="{E759A0DE-F190-5444-87AC-4719D5F20D15}" type="datetimeFigureOut">
               <a:rPr lang="en-US" smtClean="0"/>
-              <a:t>9/26/26</a:t>
+              <a:t>10/8/26</a:t>
             </a:fld>
             <a:endParaRPr lang="en-US"/>
           </a:p>
@@ -3886,8 +3886,8 @@
         </p:nvSpPr>
         <p:spPr>
           <a:xfrm>
-            <a:off x="175846" y="152399"/>
-            <a:ext cx="11828585" cy="6541477"/>
+            <a:off x="175847" y="152399"/>
+            <a:ext cx="10949354" cy="6541477"/>
           </a:xfrm>
         </p:spPr>
         <p:txBody>
@@ -4007,6 +4007,46 @@
                 <a:ea typeface="Bodoni Ornaments" pitchFamily="2" charset="0"/>
               </a:rPr>
               <a:t>And trembles at his voice Trembles at his voice</a:t>
+            </a:r>
+          </a:p>
+        </p:txBody>
+      </p:sp>
+      <p:sp>
+        <p:nvSpPr>
+          <p:cNvPr id="2" name="TextBox 1">
+            <a:extLst>
+              <a:ext uri="{FF2B5EF4-FFF2-40B4-BE49-F238E27FC236}">
+                <a16:creationId xmlns:a16="http://schemas.microsoft.com/office/drawing/2014/main" id="{FADD771B-7E31-1E0B-DD74-477524D333F9}"/>
+              </a:ext>
+            </a:extLst>
+          </p:cNvPr>
+          <p:cNvSpPr txBox="1"/>
+          <p:nvPr/>
+        </p:nvSpPr>
+        <p:spPr>
+          <a:xfrm>
+            <a:off x="7683500" y="6211669"/>
+            <a:ext cx="4200552" cy="646331"/>
+          </a:xfrm>
+          <a:prstGeom prst="rect">
+            <a:avLst/>
+          </a:prstGeom>
+          <a:noFill/>
+        </p:spPr>
+        <p:txBody>
+          <a:bodyPr wrap="square" rtlCol="0">
+            <a:spAutoFit/>
+          </a:bodyPr>
+          <a:lstStyle/>
+          <a:p>
+            <a:pPr algn="r"/>
+            <a:r>
+              <a:rPr lang="en-US" sz="3600" b="1" dirty="0">
+                <a:solidFill>
+                  <a:schemeClr val="bg1"/>
+                </a:solidFill>
+              </a:rPr>
+              <a:t>To CHORUS</a:t>
             </a:r>
           </a:p>
         </p:txBody>
@@ -4177,6 +4217,46 @@
           </a:p>
         </p:txBody>
       </p:sp>
+      <p:sp>
+        <p:nvSpPr>
+          <p:cNvPr id="2" name="TextBox 1">
+            <a:extLst>
+              <a:ext uri="{FF2B5EF4-FFF2-40B4-BE49-F238E27FC236}">
+                <a16:creationId xmlns:a16="http://schemas.microsoft.com/office/drawing/2014/main" id="{5271B9E9-2B63-C772-D92A-EB57E487C140}"/>
+              </a:ext>
+            </a:extLst>
+          </p:cNvPr>
+          <p:cNvSpPr txBox="1"/>
+          <p:nvPr/>
+        </p:nvSpPr>
+        <p:spPr>
+          <a:xfrm>
+            <a:off x="7683500" y="6211669"/>
+            <a:ext cx="4200552" cy="646331"/>
+          </a:xfrm>
+          <a:prstGeom prst="rect">
+            <a:avLst/>
+          </a:prstGeom>
+          <a:noFill/>
+        </p:spPr>
+        <p:txBody>
+          <a:bodyPr wrap="square" rtlCol="0">
+            <a:spAutoFit/>
+          </a:bodyPr>
+          <a:lstStyle/>
+          <a:p>
+            <a:pPr algn="r"/>
+            <a:r>
+              <a:rPr lang="en-US" sz="3600" b="1" dirty="0">
+                <a:solidFill>
+                  <a:schemeClr val="bg1"/>
+                </a:solidFill>
+              </a:rPr>
+              <a:t>To VERSE</a:t>
+            </a:r>
+          </a:p>
+        </p:txBody>
+      </p:sp>
     </p:spTree>
     <p:extLst>
       <p:ext uri="{BB962C8B-B14F-4D97-AF65-F5344CB8AC3E}">
@@ -4360,6 +4440,46 @@
                 <a:ea typeface="Bodoni Ornaments" pitchFamily="2" charset="0"/>
               </a:rPr>
               <a:t>The Lion and the Lamb The Lion and the Lamb</a:t>
+            </a:r>
+          </a:p>
+        </p:txBody>
+      </p:sp>
+      <p:sp>
+        <p:nvSpPr>
+          <p:cNvPr id="2" name="TextBox 1">
+            <a:extLst>
+              <a:ext uri="{FF2B5EF4-FFF2-40B4-BE49-F238E27FC236}">
+                <a16:creationId xmlns:a16="http://schemas.microsoft.com/office/drawing/2014/main" id="{3EE5E83C-5E3A-E1EA-5297-A4005CF65103}"/>
+              </a:ext>
+            </a:extLst>
+          </p:cNvPr>
+          <p:cNvSpPr txBox="1"/>
+          <p:nvPr/>
+        </p:nvSpPr>
+        <p:spPr>
+          <a:xfrm>
+            <a:off x="7683500" y="6211669"/>
+            <a:ext cx="4200552" cy="646331"/>
+          </a:xfrm>
+          <a:prstGeom prst="rect">
+            <a:avLst/>
+          </a:prstGeom>
+          <a:noFill/>
+        </p:spPr>
+        <p:txBody>
+          <a:bodyPr wrap="square" rtlCol="0">
+            <a:spAutoFit/>
+          </a:bodyPr>
+          <a:lstStyle/>
+          <a:p>
+            <a:pPr algn="r"/>
+            <a:r>
+              <a:rPr lang="en-US" sz="3600" b="1" dirty="0">
+                <a:solidFill>
+                  <a:schemeClr val="bg1"/>
+                </a:solidFill>
+              </a:rPr>
+              <a:t>To CHORUS</a:t>
             </a:r>
           </a:p>
         </p:txBody>
@@ -4530,6 +4650,46 @@
           </a:p>
         </p:txBody>
       </p:sp>
+      <p:sp>
+        <p:nvSpPr>
+          <p:cNvPr id="2" name="TextBox 1">
+            <a:extLst>
+              <a:ext uri="{FF2B5EF4-FFF2-40B4-BE49-F238E27FC236}">
+                <a16:creationId xmlns:a16="http://schemas.microsoft.com/office/drawing/2014/main" id="{94E120B0-B742-E258-B2DD-EC3D655D7441}"/>
+              </a:ext>
+            </a:extLst>
+          </p:cNvPr>
+          <p:cNvSpPr txBox="1"/>
+          <p:nvPr/>
+        </p:nvSpPr>
+        <p:spPr>
+          <a:xfrm>
+            <a:off x="7683500" y="6211669"/>
+            <a:ext cx="4200552" cy="646331"/>
+          </a:xfrm>
+          <a:prstGeom prst="rect">
+            <a:avLst/>
+          </a:prstGeom>
+          <a:noFill/>
+        </p:spPr>
+        <p:txBody>
+          <a:bodyPr wrap="square" rtlCol="0">
+            <a:spAutoFit/>
+          </a:bodyPr>
+          <a:lstStyle/>
+          <a:p>
+            <a:pPr algn="r"/>
+            <a:r>
+              <a:rPr lang="en-US" sz="3600" b="1" dirty="0">
+                <a:solidFill>
+                  <a:schemeClr val="bg1"/>
+                </a:solidFill>
+              </a:rPr>
+              <a:t>To BRIDGE</a:t>
+            </a:r>
+          </a:p>
+        </p:txBody>
+      </p:sp>
     </p:spTree>
     <p:extLst>
       <p:ext uri="{BB962C8B-B14F-4D97-AF65-F5344CB8AC3E}">
@@ -4741,7 +4901,7 @@
         </p:nvSpPr>
         <p:spPr>
           <a:xfrm>
-            <a:off x="8309847" y="6047546"/>
+            <a:off x="9344826" y="6047546"/>
             <a:ext cx="2624436" cy="646331"/>
           </a:xfrm>
           <a:prstGeom prst="rect">
@@ -4946,7 +5106,7 @@
         </p:nvSpPr>
         <p:spPr>
           <a:xfrm>
-            <a:off x="8622127" y="6047546"/>
+            <a:off x="10108027" y="6211669"/>
             <a:ext cx="1558440" cy="646331"/>
           </a:xfrm>
           <a:prstGeom prst="rect">
